--- a/PPTs/Ch9_64_bit_data_processing.pptx
+++ b/PPTs/Ch9_64_bit_data_processing.pptx
@@ -142,196 +142,37 @@
 </p:presentation>
 </file>
 
-<file path=ppt/revisionInfo.xml><?xml version="1.0" encoding="utf-8"?>
-<p1510:revInfo xmlns:a="http://schemas.openxmlformats.org/drawingml/2006/main" xmlns:r="http://schemas.openxmlformats.org/officeDocument/2006/relationships" xmlns:p1510="http://schemas.microsoft.com/office/powerpoint/2015/10/main">
-  <p1510:revLst>
-    <p1510:client id="{BF3FB78D-86D8-43C7-A58D-9A35E0023D37}" v="8" dt="2025-10-05T20:43:05.784"/>
-  </p1510:revLst>
-</p1510:revInfo>
-</file>
-
 <file path=ppt/changesInfos/changesInfo1.xml><?xml version="1.0" encoding="utf-8"?>
 <pc:chgInfo xmlns:a="http://schemas.openxmlformats.org/drawingml/2006/main" xmlns:r="http://schemas.openxmlformats.org/officeDocument/2006/relationships" xmlns:ac="http://schemas.microsoft.com/office/drawing/2013/main/command" xmlns:pc="http://schemas.microsoft.com/office/powerpoint/2013/main/command">
   <pc:docChgLst>
     <pc:chgData name="Zonghua Gu" userId="9a7e1853e1951ef5" providerId="LiveId" clId="{CF1FAA12-072C-4ED5-BA76-0FFFAEFDB88A}"/>
-    <pc:docChg chg="custSel addSld delSld modSld">
-      <pc:chgData name="Zonghua Gu" userId="9a7e1853e1951ef5" providerId="LiveId" clId="{CF1FAA12-072C-4ED5-BA76-0FFFAEFDB88A}" dt="2025-10-05T20:43:51.203" v="22" actId="208"/>
+    <pc:docChg chg="undo custSel addSld delSld modSld">
+      <pc:chgData name="Zonghua Gu" userId="9a7e1853e1951ef5" providerId="LiveId" clId="{CF1FAA12-072C-4ED5-BA76-0FFFAEFDB88A}" dt="2026-04-28T14:01:50.862" v="55" actId="1038"/>
       <pc:docMkLst>
         <pc:docMk/>
       </pc:docMkLst>
-      <pc:sldChg chg="addSp delSp modSp del mod">
-        <pc:chgData name="Zonghua Gu" userId="9a7e1853e1951ef5" providerId="LiveId" clId="{CF1FAA12-072C-4ED5-BA76-0FFFAEFDB88A}" dt="2025-10-05T20:39:45.511" v="2" actId="47"/>
+      <pc:sldChg chg="modSp mod">
+        <pc:chgData name="Zonghua Gu" userId="9a7e1853e1951ef5" providerId="LiveId" clId="{CF1FAA12-072C-4ED5-BA76-0FFFAEFDB88A}" dt="2026-04-28T14:01:50.862" v="55" actId="1038"/>
         <pc:sldMkLst>
           <pc:docMk/>
-          <pc:sldMk cId="1683281344" sldId="256"/>
+          <pc:sldMk cId="3371855514" sldId="268"/>
         </pc:sldMkLst>
-        <pc:spChg chg="del">
-          <ac:chgData name="Zonghua Gu" userId="9a7e1853e1951ef5" providerId="LiveId" clId="{CF1FAA12-072C-4ED5-BA76-0FFFAEFDB88A}" dt="2025-10-05T20:39:37.818" v="0" actId="478"/>
+        <pc:spChg chg="mod">
+          <ac:chgData name="Zonghua Gu" userId="9a7e1853e1951ef5" providerId="LiveId" clId="{CF1FAA12-072C-4ED5-BA76-0FFFAEFDB88A}" dt="2026-04-28T14:01:50.862" v="55" actId="1038"/>
           <ac:spMkLst>
             <pc:docMk/>
-            <pc:sldMk cId="1683281344" sldId="256"/>
-            <ac:spMk id="2" creationId="{00000000-0000-0000-0000-000000000000}"/>
+            <pc:sldMk cId="3371855514" sldId="268"/>
+            <ac:spMk id="11" creationId="{1F66DCDC-260C-EA34-9282-5EF46AC1E57D}"/>
           </ac:spMkLst>
         </pc:spChg>
-        <pc:spChg chg="del">
-          <ac:chgData name="Zonghua Gu" userId="9a7e1853e1951ef5" providerId="LiveId" clId="{CF1FAA12-072C-4ED5-BA76-0FFFAEFDB88A}" dt="2025-10-05T20:39:37.818" v="0" actId="478"/>
-          <ac:spMkLst>
+        <pc:picChg chg="mod">
+          <ac:chgData name="Zonghua Gu" userId="9a7e1853e1951ef5" providerId="LiveId" clId="{CF1FAA12-072C-4ED5-BA76-0FFFAEFDB88A}" dt="2026-04-28T14:01:30.980" v="43" actId="1076"/>
+          <ac:picMkLst>
             <pc:docMk/>
-            <pc:sldMk cId="1683281344" sldId="256"/>
-            <ac:spMk id="3" creationId="{00000000-0000-0000-0000-000000000000}"/>
-          </ac:spMkLst>
-        </pc:spChg>
-        <pc:spChg chg="del">
-          <ac:chgData name="Zonghua Gu" userId="9a7e1853e1951ef5" providerId="LiveId" clId="{CF1FAA12-072C-4ED5-BA76-0FFFAEFDB88A}" dt="2025-10-05T20:39:37.818" v="0" actId="478"/>
-          <ac:spMkLst>
-            <pc:docMk/>
-            <pc:sldMk cId="1683281344" sldId="256"/>
-            <ac:spMk id="6" creationId="{00000000-0000-0000-0000-000000000000}"/>
-          </ac:spMkLst>
-        </pc:spChg>
-        <pc:spChg chg="add mod">
-          <ac:chgData name="Zonghua Gu" userId="9a7e1853e1951ef5" providerId="LiveId" clId="{CF1FAA12-072C-4ED5-BA76-0FFFAEFDB88A}" dt="2025-10-05T20:39:37.818" v="0" actId="478"/>
-          <ac:spMkLst>
-            <pc:docMk/>
-            <pc:sldMk cId="1683281344" sldId="256"/>
-            <ac:spMk id="8" creationId="{94C8CF98-66DC-FBB5-D844-D3A4121BE169}"/>
-          </ac:spMkLst>
-        </pc:spChg>
-        <pc:spChg chg="add mod">
-          <ac:chgData name="Zonghua Gu" userId="9a7e1853e1951ef5" providerId="LiveId" clId="{CF1FAA12-072C-4ED5-BA76-0FFFAEFDB88A}" dt="2025-10-05T20:39:37.818" v="0" actId="478"/>
-          <ac:spMkLst>
-            <pc:docMk/>
-            <pc:sldMk cId="1683281344" sldId="256"/>
-            <ac:spMk id="10" creationId="{3228A856-3CB1-A397-6598-E3214C6B8E4F}"/>
-          </ac:spMkLst>
-        </pc:spChg>
-      </pc:sldChg>
-      <pc:sldChg chg="addSp modSp mod">
-        <pc:chgData name="Zonghua Gu" userId="9a7e1853e1951ef5" providerId="LiveId" clId="{CF1FAA12-072C-4ED5-BA76-0FFFAEFDB88A}" dt="2025-10-05T20:43:41.988" v="20" actId="208"/>
-        <pc:sldMkLst>
-          <pc:docMk/>
-          <pc:sldMk cId="447900016" sldId="257"/>
-        </pc:sldMkLst>
-        <pc:spChg chg="add mod">
-          <ac:chgData name="Zonghua Gu" userId="9a7e1853e1951ef5" providerId="LiveId" clId="{CF1FAA12-072C-4ED5-BA76-0FFFAEFDB88A}" dt="2025-10-05T20:43:41.988" v="20" actId="208"/>
-          <ac:spMkLst>
-            <pc:docMk/>
-            <pc:sldMk cId="447900016" sldId="257"/>
-            <ac:spMk id="5" creationId="{BC970528-BC53-C0A5-D452-682668CDC489}"/>
-          </ac:spMkLst>
-        </pc:spChg>
-      </pc:sldChg>
-      <pc:sldChg chg="addSp modSp mod">
-        <pc:chgData name="Zonghua Gu" userId="9a7e1853e1951ef5" providerId="LiveId" clId="{CF1FAA12-072C-4ED5-BA76-0FFFAEFDB88A}" dt="2025-10-05T20:43:45.475" v="21" actId="208"/>
-        <pc:sldMkLst>
-          <pc:docMk/>
-          <pc:sldMk cId="232496035" sldId="258"/>
-        </pc:sldMkLst>
-        <pc:spChg chg="add mod">
-          <ac:chgData name="Zonghua Gu" userId="9a7e1853e1951ef5" providerId="LiveId" clId="{CF1FAA12-072C-4ED5-BA76-0FFFAEFDB88A}" dt="2025-10-05T20:43:45.475" v="21" actId="208"/>
-          <ac:spMkLst>
-            <pc:docMk/>
-            <pc:sldMk cId="232496035" sldId="258"/>
-            <ac:spMk id="5" creationId="{63FACEAE-2AD7-ACCE-CECA-DC82E80DF8FF}"/>
-          </ac:spMkLst>
-        </pc:spChg>
-      </pc:sldChg>
-      <pc:sldChg chg="del">
-        <pc:chgData name="Zonghua Gu" userId="9a7e1853e1951ef5" providerId="LiveId" clId="{CF1FAA12-072C-4ED5-BA76-0FFFAEFDB88A}" dt="2025-10-05T20:41:54.666" v="13" actId="47"/>
-        <pc:sldMkLst>
-          <pc:docMk/>
-          <pc:sldMk cId="1355074441" sldId="260"/>
-        </pc:sldMkLst>
-      </pc:sldChg>
-      <pc:sldChg chg="del">
-        <pc:chgData name="Zonghua Gu" userId="9a7e1853e1951ef5" providerId="LiveId" clId="{CF1FAA12-072C-4ED5-BA76-0FFFAEFDB88A}" dt="2025-10-05T20:43:15.281" v="17" actId="47"/>
-        <pc:sldMkLst>
-          <pc:docMk/>
-          <pc:sldMk cId="3638645966" sldId="263"/>
-        </pc:sldMkLst>
-      </pc:sldChg>
-      <pc:sldChg chg="modSp add mod">
-        <pc:chgData name="Zonghua Gu" userId="9a7e1853e1951ef5" providerId="LiveId" clId="{CF1FAA12-072C-4ED5-BA76-0FFFAEFDB88A}" dt="2025-10-05T20:39:54.366" v="3" actId="1076"/>
-        <pc:sldMkLst>
-          <pc:docMk/>
-          <pc:sldMk cId="839383286" sldId="269"/>
-        </pc:sldMkLst>
-        <pc:spChg chg="mod">
-          <ac:chgData name="Zonghua Gu" userId="9a7e1853e1951ef5" providerId="LiveId" clId="{CF1FAA12-072C-4ED5-BA76-0FFFAEFDB88A}" dt="2025-10-05T20:39:54.366" v="3" actId="1076"/>
-          <ac:spMkLst>
-            <pc:docMk/>
-            <pc:sldMk cId="839383286" sldId="269"/>
-            <ac:spMk id="5" creationId="{00000000-0000-0000-0000-000000000000}"/>
-          </ac:spMkLst>
-        </pc:spChg>
-        <pc:spChg chg="mod">
-          <ac:chgData name="Zonghua Gu" userId="9a7e1853e1951ef5" providerId="LiveId" clId="{CF1FAA12-072C-4ED5-BA76-0FFFAEFDB88A}" dt="2025-10-05T20:39:54.366" v="3" actId="1076"/>
-          <ac:spMkLst>
-            <pc:docMk/>
-            <pc:sldMk cId="839383286" sldId="269"/>
-            <ac:spMk id="6" creationId="{00000000-0000-0000-0000-000000000000}"/>
-          </ac:spMkLst>
-        </pc:spChg>
-      </pc:sldChg>
-      <pc:sldChg chg="modSp add mod">
-        <pc:chgData name="Zonghua Gu" userId="9a7e1853e1951ef5" providerId="LiveId" clId="{CF1FAA12-072C-4ED5-BA76-0FFFAEFDB88A}" dt="2025-10-05T20:41:16.034" v="11" actId="27636"/>
-        <pc:sldMkLst>
-          <pc:docMk/>
-          <pc:sldMk cId="3446674091" sldId="270"/>
-        </pc:sldMkLst>
-        <pc:spChg chg="mod">
-          <ac:chgData name="Zonghua Gu" userId="9a7e1853e1951ef5" providerId="LiveId" clId="{CF1FAA12-072C-4ED5-BA76-0FFFAEFDB88A}" dt="2025-10-05T20:41:16.034" v="11" actId="27636"/>
-          <ac:spMkLst>
-            <pc:docMk/>
-            <pc:sldMk cId="3446674091" sldId="270"/>
-            <ac:spMk id="2" creationId="{38FF185C-1F57-A7D0-C373-932269F2E81F}"/>
-          </ac:spMkLst>
-        </pc:spChg>
-        <pc:spChg chg="mod">
-          <ac:chgData name="Zonghua Gu" userId="9a7e1853e1951ef5" providerId="LiveId" clId="{CF1FAA12-072C-4ED5-BA76-0FFFAEFDB88A}" dt="2025-10-05T20:41:16.030" v="10" actId="27636"/>
-          <ac:spMkLst>
-            <pc:docMk/>
-            <pc:sldMk cId="3446674091" sldId="270"/>
-            <ac:spMk id="4" creationId="{9FF2DBCF-749D-BC85-1FB3-2369244197E6}"/>
-          </ac:spMkLst>
-        </pc:spChg>
-      </pc:sldChg>
-      <pc:sldChg chg="modSp add mod">
-        <pc:chgData name="Zonghua Gu" userId="9a7e1853e1951ef5" providerId="LiveId" clId="{CF1FAA12-072C-4ED5-BA76-0FFFAEFDB88A}" dt="2025-10-05T20:43:51.203" v="22" actId="208"/>
-        <pc:sldMkLst>
-          <pc:docMk/>
-          <pc:sldMk cId="1257666469" sldId="271"/>
-        </pc:sldMkLst>
-        <pc:spChg chg="mod">
-          <ac:chgData name="Zonghua Gu" userId="9a7e1853e1951ef5" providerId="LiveId" clId="{CF1FAA12-072C-4ED5-BA76-0FFFAEFDB88A}" dt="2025-10-05T20:43:51.203" v="22" actId="208"/>
-          <ac:spMkLst>
-            <pc:docMk/>
-            <pc:sldMk cId="1257666469" sldId="271"/>
-            <ac:spMk id="5" creationId="{2F0F3C14-4D54-0031-95AB-451FB9954532}"/>
-          </ac:spMkLst>
-        </pc:spChg>
-      </pc:sldChg>
-      <pc:sldChg chg="modSp add mod">
-        <pc:chgData name="Zonghua Gu" userId="9a7e1853e1951ef5" providerId="LiveId" clId="{CF1FAA12-072C-4ED5-BA76-0FFFAEFDB88A}" dt="2025-10-05T20:43:26.432" v="19" actId="208"/>
-        <pc:sldMkLst>
-          <pc:docMk/>
-          <pc:sldMk cId="226668900" sldId="272"/>
-        </pc:sldMkLst>
-        <pc:spChg chg="mod">
-          <ac:chgData name="Zonghua Gu" userId="9a7e1853e1951ef5" providerId="LiveId" clId="{CF1FAA12-072C-4ED5-BA76-0FFFAEFDB88A}" dt="2025-10-05T20:43:26.432" v="19" actId="208"/>
-          <ac:spMkLst>
-            <pc:docMk/>
-            <pc:sldMk cId="226668900" sldId="272"/>
-            <ac:spMk id="5" creationId="{0D45E53C-60AD-25C3-58B1-487C352241E8}"/>
-          </ac:spMkLst>
-        </pc:spChg>
-      </pc:sldChg>
-      <pc:sldChg chg="add del">
-        <pc:chgData name="Zonghua Gu" userId="9a7e1853e1951ef5" providerId="LiveId" clId="{CF1FAA12-072C-4ED5-BA76-0FFFAEFDB88A}" dt="2025-10-05T20:43:04.846" v="15"/>
-        <pc:sldMkLst>
-          <pc:docMk/>
-          <pc:sldMk cId="1863276422" sldId="272"/>
-        </pc:sldMkLst>
+            <pc:sldMk cId="3371855514" sldId="268"/>
+            <ac:picMk id="5" creationId="{4D38B958-46BB-9D65-5CFE-EF5010B12657}"/>
+          </ac:picMkLst>
+        </pc:picChg>
       </pc:sldChg>
     </pc:docChg>
   </pc:docChgLst>
@@ -421,7 +262,7 @@
             <a:fld id="{BD4F56A7-3CDE-194F-B9AF-D598FBBF1989}" type="datetimeFigureOut">
               <a:rPr lang="en-US" smtClean="0"/>
               <a:pPr/>
-              <a:t>10/5/2025</a:t>
+              <a:t>4/28/2026</a:t>
             </a:fld>
             <a:endParaRPr lang="en-US"/>
           </a:p>
@@ -589,7 +430,7 @@
             <a:fld id="{1E52AD58-60CE-E948-9CBA-0BD7030FC28E}" type="datetimeFigureOut">
               <a:rPr lang="en-US" smtClean="0"/>
               <a:pPr/>
-              <a:t>10/5/2025</a:t>
+              <a:t>4/28/2026</a:t>
             </a:fld>
             <a:endParaRPr lang="en-US"/>
           </a:p>
@@ -1830,7 +1671,7 @@
             <a:pPr eaLnBrk="1" latinLnBrk="0" hangingPunct="1"/>
             <a:fld id="{8E8B2B42-CBC2-7D4E-BA50-0E7F29B4DAAB}" type="datetime1">
               <a:rPr lang="en-US" smtClean="0"/>
-              <a:t>10/5/2025</a:t>
+              <a:t>4/28/2026</a:t>
             </a:fld>
             <a:endParaRPr lang="en-US" sz="1600" dirty="0"/>
           </a:p>
@@ -2190,7 +2031,7 @@
             <a:pPr eaLnBrk="1" latinLnBrk="0" hangingPunct="1"/>
             <a:fld id="{597D1259-3A46-254C-ADDB-B5DA4F1DF3DA}" type="datetime1">
               <a:rPr lang="en-US" smtClean="0"/>
-              <a:t>10/5/2025</a:t>
+              <a:t>4/28/2026</a:t>
             </a:fld>
             <a:endParaRPr lang="en-US"/>
           </a:p>
@@ -2366,7 +2207,7 @@
             <a:pPr eaLnBrk="1" latinLnBrk="0" hangingPunct="1"/>
             <a:fld id="{CCA104EC-54AA-E04F-BDC0-22B4E8892699}" type="datetime1">
               <a:rPr lang="en-US" smtClean="0"/>
-              <a:t>10/5/2025</a:t>
+              <a:t>4/28/2026</a:t>
             </a:fld>
             <a:endParaRPr lang="en-US"/>
           </a:p>
@@ -2602,7 +2443,7 @@
             <a:pPr eaLnBrk="1" latinLnBrk="0" hangingPunct="1"/>
             <a:fld id="{A9E6F060-20EB-3246-9088-08BF5F1271DE}" type="datetime1">
               <a:rPr lang="en-US" smtClean="0"/>
-              <a:t>10/5/2025</a:t>
+              <a:t>4/28/2026</a:t>
             </a:fld>
             <a:endParaRPr lang="en-US" dirty="0"/>
           </a:p>
@@ -2872,7 +2713,7 @@
             <a:pPr eaLnBrk="1" latinLnBrk="0" hangingPunct="1"/>
             <a:fld id="{34C82E41-DA7E-CA4C-823B-C759BEA16CE8}" type="datetime1">
               <a:rPr lang="en-US" smtClean="0"/>
-              <a:t>10/5/2025</a:t>
+              <a:t>4/28/2026</a:t>
             </a:fld>
             <a:endParaRPr lang="en-US" dirty="0"/>
           </a:p>
@@ -3093,7 +2934,7 @@
             <a:pPr eaLnBrk="1" latinLnBrk="0" hangingPunct="1"/>
             <a:fld id="{2500C8B0-EB1A-0A41-B839-C4B99CD2225A}" type="datetime1">
               <a:rPr lang="en-US" smtClean="0"/>
-              <a:t>10/5/2025</a:t>
+              <a:t>4/28/2026</a:t>
             </a:fld>
             <a:endParaRPr lang="en-US"/>
           </a:p>
@@ -3446,7 +3287,7 @@
             <a:pPr eaLnBrk="1" latinLnBrk="0" hangingPunct="1"/>
             <a:fld id="{4F16605B-D952-1149-A111-28A5633BAE48}" type="datetime1">
               <a:rPr lang="en-US" smtClean="0"/>
-              <a:t>10/5/2025</a:t>
+              <a:t>4/28/2026</a:t>
             </a:fld>
             <a:endParaRPr lang="en-US"/>
           </a:p>
@@ -3679,7 +3520,7 @@
             <a:pPr eaLnBrk="1" latinLnBrk="0" hangingPunct="1"/>
             <a:fld id="{91109A1C-29B2-B04E-8365-C9D22C4AE842}" type="datetime1">
               <a:rPr lang="en-US" smtClean="0"/>
-              <a:t>10/5/2025</a:t>
+              <a:t>4/28/2026</a:t>
             </a:fld>
             <a:endParaRPr lang="en-US"/>
           </a:p>
@@ -3821,7 +3662,7 @@
             <a:pPr eaLnBrk="1" latinLnBrk="0" hangingPunct="1"/>
             <a:fld id="{2CE417B6-A42B-064A-8677-46C55C4F613A}" type="datetime1">
               <a:rPr lang="en-US" smtClean="0"/>
-              <a:t>10/5/2025</a:t>
+              <a:t>4/28/2026</a:t>
             </a:fld>
             <a:endParaRPr lang="en-US"/>
           </a:p>
@@ -4099,7 +3940,7 @@
             <a:pPr eaLnBrk="1" latinLnBrk="0" hangingPunct="1"/>
             <a:fld id="{DE76F5AD-3F1F-7141-BC8A-012C5728BE2D}" type="datetime1">
               <a:rPr lang="en-US" smtClean="0"/>
-              <a:t>10/5/2025</a:t>
+              <a:t>4/28/2026</a:t>
             </a:fld>
             <a:endParaRPr lang="en-US"/>
           </a:p>
@@ -4507,7 +4348,7 @@
             <a:pPr eaLnBrk="1" latinLnBrk="0" hangingPunct="1"/>
             <a:fld id="{09FA12B8-739E-4D47-A14C-180C3BC10865}" type="datetime1">
               <a:rPr lang="en-US" smtClean="0"/>
-              <a:t>10/5/2025</a:t>
+              <a:t>4/28/2026</a:t>
             </a:fld>
             <a:endParaRPr lang="en-US"/>
           </a:p>
@@ -4845,7 +4686,7 @@
             <a:pPr eaLnBrk="1" latinLnBrk="0" hangingPunct="1"/>
             <a:fld id="{CDD18CD8-E404-844E-A4BD-DF69B8E5881E}" type="datetime1">
               <a:rPr lang="en-US" smtClean="0"/>
-              <a:t>10/5/2025</a:t>
+              <a:t>4/28/2026</a:t>
             </a:fld>
             <a:endParaRPr lang="en-US" sz="1400" dirty="0">
               <a:solidFill>
@@ -6042,8 +5883,8 @@
         </p:nvSpPr>
         <p:spPr>
           <a:xfrm>
-            <a:off x="5283202" y="1914882"/>
-            <a:ext cx="437940" cy="369332"/>
+            <a:off x="4621375" y="1948926"/>
+            <a:ext cx="2084225" cy="369332"/>
           </a:xfrm>
           <a:prstGeom prst="rect">
             <a:avLst/>
@@ -6063,7 +5904,7 @@
                 </a:solidFill>
                 <a:latin typeface="Consolas" panose="020B0609020204030204" pitchFamily="49" charset="0"/>
               </a:rPr>
-              <a:t>r4</a:t>
+              <a:t>R4 (R3, LSL #3)</a:t>
             </a:r>
           </a:p>
         </p:txBody>
